--- a/Backend/services/pptx-generator-service/slides/_comum/secao_iluminacao.pptx
+++ b/Backend/services/pptx-generator-service/slides/_comum/secao_iluminacao.pptx
@@ -3268,7 +3268,7 @@
                 <a:latin typeface="Poppins"/>
                 <a:cs typeface="Poppins"/>
               </a:rPr>
-              <a:t> metálicos, galvanizados a fogo, diâmetro de 114,40mm a 76,00mm e espessura de 2,25mm, com altura livre de 8,00m com pintura especial na cor verde;</a:t>
+              <a:t> metálicos, galvanizados a fogo, diâmetro de 114,40mm a 76,00mm e espessura de 2,25mm, com altura livre de {{ altura_postes_iluminacao_fmt }} com pintura especial na cor verde;</a:t>
             </a:r>
             <a:endParaRPr lang="en-US" sz="1200" dirty="0">
               <a:latin typeface="Poppins"/>
@@ -3306,7 +3306,7 @@
                 <a:latin typeface="Poppins"/>
                 <a:cs typeface="Poppins"/>
               </a:rPr>
-              <a:t> projetores, galvanizadas a fogo, com pintura especial na cor verde.</a:t>
+              <a:t> projetores, galvanizadas a fogo, com pintura especial na cor {{ cor_cruzetas }}.</a:t>
             </a:r>
             <a:endParaRPr lang="en-US" sz="1200" dirty="0">
               <a:latin typeface="Poppins"/>
